--- a/ai/src/ppt dataset/Blue and White Minimalist Corporate Sustainable Business Presentation.pptx
+++ b/ai/src/ppt dataset/Blue and White Minimalist Corporate Sustainable Business Presentation.pptx
@@ -3223,6 +3223,10 @@
             </a:stretch>
           </a:blipFill>
         </p:spPr>
+        <p:txBody>
+          <a:bodyPr/>
+          <a:p/>
+        </p:txBody>
       </p:sp>
       <p:sp>
         <p:nvSpPr>
@@ -3244,25 +3248,7 @@
             <a:spAutoFit/>
           </a:bodyPr>
           <a:lstStyle/>
-          <a:p>
-            <a:pPr algn="r">
-              <a:lnSpc>
-                <a:spcPts val="2860"/>
-              </a:lnSpc>
-            </a:pPr>
-            <a:r>
-              <a:rPr lang="en-US" sz="2000" spc="162">
-                <a:solidFill>
-                  <a:srgbClr val="000000"/>
-                </a:solidFill>
-                <a:latin typeface="TT Hoves"/>
-                <a:ea typeface="TT Hoves"/>
-                <a:cs typeface="TT Hoves"/>
-                <a:sym typeface="TT Hoves"/>
-              </a:rPr>
-              <a:t>reallygreatsite.com</a:t>
-            </a:r>
-          </a:p>
+          <a:p/>
         </p:txBody>
       </p:sp>
       <p:sp>
@@ -3288,6 +3274,10 @@
             <a:tailEnd type="none" len="sm" w="sm"/>
           </a:ln>
         </p:spPr>
+        <p:txBody>
+          <a:bodyPr/>
+          <a:p/>
+        </p:txBody>
       </p:sp>
       <p:sp>
         <p:nvSpPr>
@@ -3340,6 +3330,10 @@
             </a:stretch>
           </a:blipFill>
         </p:spPr>
+        <p:txBody>
+          <a:bodyPr/>
+          <a:p/>
+        </p:txBody>
       </p:sp>
       <p:sp>
         <p:nvSpPr>
@@ -3361,44 +3355,7 @@
             <a:spAutoFit/>
           </a:bodyPr>
           <a:lstStyle/>
-          <a:p>
-            <a:pPr algn="l">
-              <a:lnSpc>
-                <a:spcPts val="2500"/>
-              </a:lnSpc>
-            </a:pPr>
-            <a:r>
-              <a:rPr lang="en-US" sz="2000" spc="162">
-                <a:solidFill>
-                  <a:srgbClr val="000000"/>
-                </a:solidFill>
-                <a:latin typeface="TT Hoves"/>
-                <a:ea typeface="TT Hoves"/>
-                <a:cs typeface="TT Hoves"/>
-                <a:sym typeface="TT Hoves"/>
-              </a:rPr>
-              <a:t>Liceria</a:t>
-            </a:r>
-          </a:p>
-          <a:p>
-            <a:pPr algn="l">
-              <a:lnSpc>
-                <a:spcPts val="2500"/>
-              </a:lnSpc>
-            </a:pPr>
-            <a:r>
-              <a:rPr lang="en-US" sz="2000" spc="162">
-                <a:solidFill>
-                  <a:srgbClr val="000000"/>
-                </a:solidFill>
-                <a:latin typeface="TT Hoves"/>
-                <a:ea typeface="TT Hoves"/>
-                <a:cs typeface="TT Hoves"/>
-                <a:sym typeface="TT Hoves"/>
-              </a:rPr>
-              <a:t>&amp; Co.</a:t>
-            </a:r>
-          </a:p>
+          <a:p/>
         </p:txBody>
       </p:sp>
       <p:sp>
@@ -3421,25 +3378,7 @@
             <a:spAutoFit/>
           </a:bodyPr>
           <a:lstStyle/>
-          <a:p>
-            <a:pPr algn="l">
-              <a:lnSpc>
-                <a:spcPts val="12681"/>
-              </a:lnSpc>
-            </a:pPr>
-            <a:r>
-              <a:rPr lang="en-US" sz="11027" b="true">
-                <a:solidFill>
-                  <a:srgbClr val="000000"/>
-                </a:solidFill>
-                <a:latin typeface="TT Hoves Bold"/>
-                <a:ea typeface="TT Hoves Bold"/>
-                <a:cs typeface="TT Hoves Bold"/>
-                <a:sym typeface="TT Hoves Bold"/>
-              </a:rPr>
-              <a:t>Sustainable Business</a:t>
-            </a:r>
-          </a:p>
+          <a:p/>
         </p:txBody>
       </p:sp>
       <p:sp>
@@ -3462,25 +3401,7 @@
             <a:spAutoFit/>
           </a:bodyPr>
           <a:lstStyle/>
-          <a:p>
-            <a:pPr algn="l">
-              <a:lnSpc>
-                <a:spcPts val="2860"/>
-              </a:lnSpc>
-            </a:pPr>
-            <a:r>
-              <a:rPr lang="en-US" sz="2000" spc="92">
-                <a:solidFill>
-                  <a:srgbClr val="000000"/>
-                </a:solidFill>
-                <a:latin typeface="TT Hoves"/>
-                <a:ea typeface="TT Hoves"/>
-                <a:cs typeface="TT Hoves"/>
-                <a:sym typeface="TT Hoves"/>
-              </a:rPr>
-              <a:t>Innovative Business Models That Are Redefining Industries</a:t>
-            </a:r>
-          </a:p>
+          <a:p/>
         </p:txBody>
       </p:sp>
     </p:spTree>
@@ -3535,25 +3456,7 @@
             <a:spAutoFit/>
           </a:bodyPr>
           <a:lstStyle/>
-          <a:p>
-            <a:pPr algn="l">
-              <a:lnSpc>
-                <a:spcPts val="8625"/>
-              </a:lnSpc>
-            </a:pPr>
-            <a:r>
-              <a:rPr lang="en-US" sz="7500" b="true">
-                <a:solidFill>
-                  <a:srgbClr val="000000"/>
-                </a:solidFill>
-                <a:latin typeface="TT Hoves Bold"/>
-                <a:ea typeface="TT Hoves Bold"/>
-                <a:cs typeface="TT Hoves Bold"/>
-                <a:sym typeface="TT Hoves Bold"/>
-              </a:rPr>
-              <a:t>Operations Management</a:t>
-            </a:r>
-          </a:p>
+          <a:p/>
         </p:txBody>
       </p:sp>
       <p:sp>
@@ -3576,44 +3479,7 @@
             <a:spAutoFit/>
           </a:bodyPr>
           <a:lstStyle/>
-          <a:p>
-            <a:pPr algn="l">
-              <a:lnSpc>
-                <a:spcPts val="2500"/>
-              </a:lnSpc>
-            </a:pPr>
-            <a:r>
-              <a:rPr lang="en-US" sz="2000" spc="162">
-                <a:solidFill>
-                  <a:srgbClr val="000000"/>
-                </a:solidFill>
-                <a:latin typeface="TT Hoves"/>
-                <a:ea typeface="TT Hoves"/>
-                <a:cs typeface="TT Hoves"/>
-                <a:sym typeface="TT Hoves"/>
-              </a:rPr>
-              <a:t>Liceria</a:t>
-            </a:r>
-          </a:p>
-          <a:p>
-            <a:pPr algn="l">
-              <a:lnSpc>
-                <a:spcPts val="2500"/>
-              </a:lnSpc>
-            </a:pPr>
-            <a:r>
-              <a:rPr lang="en-US" sz="2000" spc="162">
-                <a:solidFill>
-                  <a:srgbClr val="000000"/>
-                </a:solidFill>
-                <a:latin typeface="TT Hoves"/>
-                <a:ea typeface="TT Hoves"/>
-                <a:cs typeface="TT Hoves"/>
-                <a:sym typeface="TT Hoves"/>
-              </a:rPr>
-              <a:t>&amp; Co.</a:t>
-            </a:r>
-          </a:p>
+          <a:p/>
         </p:txBody>
       </p:sp>
       <p:sp>
@@ -3667,6 +3533,10 @@
             </a:stretch>
           </a:blipFill>
         </p:spPr>
+        <p:txBody>
+          <a:bodyPr/>
+          <a:p/>
+        </p:txBody>
       </p:sp>
       <p:sp>
         <p:nvSpPr>
@@ -3688,28 +3558,7 @@
             <a:spAutoFit/>
           </a:bodyPr>
           <a:lstStyle/>
-          <a:p>
-            <a:pPr algn="l">
-              <a:lnSpc>
-                <a:spcPts val="2500"/>
-              </a:lnSpc>
-              <a:spcBef>
-                <a:spcPct val="0"/>
-              </a:spcBef>
-            </a:pPr>
-            <a:r>
-              <a:rPr lang="en-US" sz="2000">
-                <a:solidFill>
-                  <a:srgbClr val="000000"/>
-                </a:solidFill>
-                <a:latin typeface="TT Hoves"/>
-                <a:ea typeface="TT Hoves"/>
-                <a:cs typeface="TT Hoves"/>
-                <a:sym typeface="TT Hoves"/>
-              </a:rPr>
-              <a:t>Lorem ipsum dolor sit amet, consectetur adipiscing elit, sed do eiusmod tempor incididunt ut labore et dolore magna aliqua.</a:t>
-            </a:r>
-          </a:p>
+          <a:p/>
         </p:txBody>
       </p:sp>
       <p:sp>
@@ -3732,28 +3581,7 @@
             <a:spAutoFit/>
           </a:bodyPr>
           <a:lstStyle/>
-          <a:p>
-            <a:pPr algn="l">
-              <a:lnSpc>
-                <a:spcPts val="2500"/>
-              </a:lnSpc>
-              <a:spcBef>
-                <a:spcPct val="0"/>
-              </a:spcBef>
-            </a:pPr>
-            <a:r>
-              <a:rPr lang="en-US" sz="2000">
-                <a:solidFill>
-                  <a:srgbClr val="000000"/>
-                </a:solidFill>
-                <a:latin typeface="TT Hoves"/>
-                <a:ea typeface="TT Hoves"/>
-                <a:cs typeface="TT Hoves"/>
-                <a:sym typeface="TT Hoves"/>
-              </a:rPr>
-              <a:t>Lorem ipsum dolor sit amet, consectetur adipiscing elit, sed do eiusmod tempor incididunt ut labore et dolore magna aliqua.</a:t>
-            </a:r>
-          </a:p>
+          <a:p/>
         </p:txBody>
       </p:sp>
       <p:sp>
@@ -3776,28 +3604,7 @@
             <a:spAutoFit/>
           </a:bodyPr>
           <a:lstStyle/>
-          <a:p>
-            <a:pPr algn="l">
-              <a:lnSpc>
-                <a:spcPts val="2500"/>
-              </a:lnSpc>
-              <a:spcBef>
-                <a:spcPct val="0"/>
-              </a:spcBef>
-            </a:pPr>
-            <a:r>
-              <a:rPr lang="en-US" sz="2000">
-                <a:solidFill>
-                  <a:srgbClr val="000000"/>
-                </a:solidFill>
-                <a:latin typeface="TT Hoves"/>
-                <a:ea typeface="TT Hoves"/>
-                <a:cs typeface="TT Hoves"/>
-                <a:sym typeface="TT Hoves"/>
-              </a:rPr>
-              <a:t>Lorem ipsum dolor sit amet, consectetur adipiscing elit, sed do eiusmod tempor incididunt ut labore et dolore magna aliqua.</a:t>
-            </a:r>
-          </a:p>
+          <a:p/>
         </p:txBody>
       </p:sp>
       <p:sp>
@@ -3820,28 +3627,7 @@
             <a:spAutoFit/>
           </a:bodyPr>
           <a:lstStyle/>
-          <a:p>
-            <a:pPr algn="l">
-              <a:lnSpc>
-                <a:spcPts val="2500"/>
-              </a:lnSpc>
-              <a:spcBef>
-                <a:spcPct val="0"/>
-              </a:spcBef>
-            </a:pPr>
-            <a:r>
-              <a:rPr lang="en-US" sz="2000">
-                <a:solidFill>
-                  <a:srgbClr val="000000"/>
-                </a:solidFill>
-                <a:latin typeface="TT Hoves"/>
-                <a:ea typeface="TT Hoves"/>
-                <a:cs typeface="TT Hoves"/>
-                <a:sym typeface="TT Hoves"/>
-              </a:rPr>
-              <a:t>Lorem ipsum dolor sit amet, consectetur adipiscing elit, sed do eiusmod tempor incididunt ut labore et dolore magna aliqua.</a:t>
-            </a:r>
-          </a:p>
+          <a:p/>
         </p:txBody>
       </p:sp>
       <p:grpSp>
@@ -3989,25 +3775,7 @@
             <a:spAutoFit/>
           </a:bodyPr>
           <a:lstStyle/>
-          <a:p>
-            <a:pPr algn="l">
-              <a:lnSpc>
-                <a:spcPts val="2874"/>
-              </a:lnSpc>
-            </a:pPr>
-            <a:r>
-              <a:rPr lang="en-US" sz="2499" b="true">
-                <a:solidFill>
-                  <a:srgbClr val="000000"/>
-                </a:solidFill>
-                <a:latin typeface="TT Hoves Bold"/>
-                <a:ea typeface="TT Hoves Bold"/>
-                <a:cs typeface="TT Hoves Bold"/>
-                <a:sym typeface="TT Hoves Bold"/>
-              </a:rPr>
-              <a:t>Assesment</a:t>
-            </a:r>
-          </a:p>
+          <a:p/>
         </p:txBody>
       </p:sp>
       <p:sp>
@@ -4030,25 +3798,7 @@
             <a:spAutoFit/>
           </a:bodyPr>
           <a:lstStyle/>
-          <a:p>
-            <a:pPr algn="l">
-              <a:lnSpc>
-                <a:spcPts val="2874"/>
-              </a:lnSpc>
-            </a:pPr>
-            <a:r>
-              <a:rPr lang="en-US" sz="2499" b="true">
-                <a:solidFill>
-                  <a:srgbClr val="000000"/>
-                </a:solidFill>
-                <a:latin typeface="TT Hoves Bold"/>
-                <a:ea typeface="TT Hoves Bold"/>
-                <a:cs typeface="TT Hoves Bold"/>
-                <a:sym typeface="TT Hoves Bold"/>
-              </a:rPr>
-              <a:t>Planning</a:t>
-            </a:r>
-          </a:p>
+          <a:p/>
         </p:txBody>
       </p:sp>
       <p:sp>
@@ -4071,25 +3821,7 @@
             <a:spAutoFit/>
           </a:bodyPr>
           <a:lstStyle/>
-          <a:p>
-            <a:pPr algn="l">
-              <a:lnSpc>
-                <a:spcPts val="2874"/>
-              </a:lnSpc>
-            </a:pPr>
-            <a:r>
-              <a:rPr lang="en-US" sz="2499" b="true">
-                <a:solidFill>
-                  <a:srgbClr val="000000"/>
-                </a:solidFill>
-                <a:latin typeface="TT Hoves Bold"/>
-                <a:ea typeface="TT Hoves Bold"/>
-                <a:cs typeface="TT Hoves Bold"/>
-                <a:sym typeface="TT Hoves Bold"/>
-              </a:rPr>
-              <a:t>Implementation</a:t>
-            </a:r>
-          </a:p>
+          <a:p/>
         </p:txBody>
       </p:sp>
       <p:sp>
@@ -4112,25 +3844,7 @@
             <a:spAutoFit/>
           </a:bodyPr>
           <a:lstStyle/>
-          <a:p>
-            <a:pPr algn="l">
-              <a:lnSpc>
-                <a:spcPts val="2874"/>
-              </a:lnSpc>
-            </a:pPr>
-            <a:r>
-              <a:rPr lang="en-US" sz="2499" b="true">
-                <a:solidFill>
-                  <a:srgbClr val="000000"/>
-                </a:solidFill>
-                <a:latin typeface="TT Hoves Bold"/>
-                <a:ea typeface="TT Hoves Bold"/>
-                <a:cs typeface="TT Hoves Bold"/>
-                <a:sym typeface="TT Hoves Bold"/>
-              </a:rPr>
-              <a:t>Monitoring</a:t>
-            </a:r>
-          </a:p>
+          <a:p/>
         </p:txBody>
       </p:sp>
       <p:sp>
@@ -4184,6 +3898,10 @@
             </a:stretch>
           </a:blipFill>
         </p:spPr>
+        <p:txBody>
+          <a:bodyPr/>
+          <a:p/>
+        </p:txBody>
       </p:sp>
     </p:spTree>
   </p:cSld>
@@ -4262,6 +3980,10 @@
             </a:stretch>
           </a:blipFill>
         </p:spPr>
+        <p:txBody>
+          <a:bodyPr/>
+          <a:p/>
+        </p:txBody>
       </p:sp>
       <p:grpSp>
         <p:nvGrpSpPr>
@@ -4388,25 +4110,7 @@
             <a:spAutoFit/>
           </a:bodyPr>
           <a:lstStyle/>
-          <a:p>
-            <a:pPr algn="l">
-              <a:lnSpc>
-                <a:spcPts val="8625"/>
-              </a:lnSpc>
-            </a:pPr>
-            <a:r>
-              <a:rPr lang="en-US" sz="7500" b="true">
-                <a:solidFill>
-                  <a:srgbClr val="000000"/>
-                </a:solidFill>
-                <a:latin typeface="TT Hoves Bold"/>
-                <a:ea typeface="TT Hoves Bold"/>
-                <a:cs typeface="TT Hoves Bold"/>
-                <a:sym typeface="TT Hoves Bold"/>
-              </a:rPr>
-              <a:t>Q &amp; A</a:t>
-            </a:r>
-          </a:p>
+          <a:p/>
         </p:txBody>
       </p:sp>
       <p:sp>
@@ -4429,25 +4133,7 @@
             <a:spAutoFit/>
           </a:bodyPr>
           <a:lstStyle/>
-          <a:p>
-            <a:pPr algn="l">
-              <a:lnSpc>
-                <a:spcPts val="4312"/>
-              </a:lnSpc>
-            </a:pPr>
-            <a:r>
-              <a:rPr lang="en-US" sz="3749" b="true">
-                <a:solidFill>
-                  <a:srgbClr val="000000"/>
-                </a:solidFill>
-                <a:latin typeface="TT Hoves Bold"/>
-                <a:ea typeface="TT Hoves Bold"/>
-                <a:cs typeface="TT Hoves Bold"/>
-                <a:sym typeface="TT Hoves Bold"/>
-              </a:rPr>
-              <a:t>Question and Answers</a:t>
-            </a:r>
-          </a:p>
+          <a:p/>
         </p:txBody>
       </p:sp>
       <p:sp>
@@ -4470,44 +4156,7 @@
             <a:spAutoFit/>
           </a:bodyPr>
           <a:lstStyle/>
-          <a:p>
-            <a:pPr algn="l">
-              <a:lnSpc>
-                <a:spcPts val="2500"/>
-              </a:lnSpc>
-            </a:pPr>
-            <a:r>
-              <a:rPr lang="en-US" sz="2000" spc="162">
-                <a:solidFill>
-                  <a:srgbClr val="000000"/>
-                </a:solidFill>
-                <a:latin typeface="TT Hoves"/>
-                <a:ea typeface="TT Hoves"/>
-                <a:cs typeface="TT Hoves"/>
-                <a:sym typeface="TT Hoves"/>
-              </a:rPr>
-              <a:t>Liceria</a:t>
-            </a:r>
-          </a:p>
-          <a:p>
-            <a:pPr algn="l">
-              <a:lnSpc>
-                <a:spcPts val="2500"/>
-              </a:lnSpc>
-            </a:pPr>
-            <a:r>
-              <a:rPr lang="en-US" sz="2000" spc="162">
-                <a:solidFill>
-                  <a:srgbClr val="000000"/>
-                </a:solidFill>
-                <a:latin typeface="TT Hoves"/>
-                <a:ea typeface="TT Hoves"/>
-                <a:cs typeface="TT Hoves"/>
-                <a:sym typeface="TT Hoves"/>
-              </a:rPr>
-              <a:t>&amp; Co.</a:t>
-            </a:r>
-          </a:p>
+          <a:p/>
         </p:txBody>
       </p:sp>
       <p:sp>
@@ -4561,6 +4210,10 @@
             </a:stretch>
           </a:blipFill>
         </p:spPr>
+        <p:txBody>
+          <a:bodyPr/>
+          <a:p/>
+        </p:txBody>
       </p:sp>
       <p:sp>
         <p:nvSpPr>
@@ -4613,6 +4266,10 @@
             </a:stretch>
           </a:blipFill>
         </p:spPr>
+        <p:txBody>
+          <a:bodyPr/>
+          <a:p/>
+        </p:txBody>
       </p:sp>
     </p:spTree>
   </p:cSld>
@@ -4782,6 +4439,10 @@
             </a:stretch>
           </a:blipFill>
         </p:spPr>
+        <p:txBody>
+          <a:bodyPr/>
+          <a:p/>
+        </p:txBody>
       </p:sp>
       <p:sp>
         <p:nvSpPr>
@@ -4803,25 +4464,7 @@
             <a:spAutoFit/>
           </a:bodyPr>
           <a:lstStyle/>
-          <a:p>
-            <a:pPr algn="r">
-              <a:lnSpc>
-                <a:spcPts val="2860"/>
-              </a:lnSpc>
-            </a:pPr>
-            <a:r>
-              <a:rPr lang="en-US" sz="2000" spc="162">
-                <a:solidFill>
-                  <a:srgbClr val="000000"/>
-                </a:solidFill>
-                <a:latin typeface="TT Hoves"/>
-                <a:ea typeface="TT Hoves"/>
-                <a:cs typeface="TT Hoves"/>
-                <a:sym typeface="TT Hoves"/>
-              </a:rPr>
-              <a:t>reallygreatsite.com</a:t>
-            </a:r>
-          </a:p>
+          <a:p/>
         </p:txBody>
       </p:sp>
       <p:sp>
@@ -4847,6 +4490,10 @@
             <a:tailEnd type="none" len="sm" w="sm"/>
           </a:ln>
         </p:spPr>
+        <p:txBody>
+          <a:bodyPr/>
+          <a:p/>
+        </p:txBody>
       </p:sp>
       <p:sp>
         <p:nvSpPr>
@@ -4871,6 +4518,10 @@
             <a:tailEnd type="none" len="sm" w="sm"/>
           </a:ln>
         </p:spPr>
+        <p:txBody>
+          <a:bodyPr/>
+          <a:p/>
+        </p:txBody>
       </p:sp>
       <p:sp>
         <p:nvSpPr>
@@ -4923,6 +4574,10 @@
             </a:stretch>
           </a:blipFill>
         </p:spPr>
+        <p:txBody>
+          <a:bodyPr/>
+          <a:p/>
+        </p:txBody>
       </p:sp>
       <p:sp>
         <p:nvSpPr>
@@ -4944,44 +4599,7 @@
             <a:spAutoFit/>
           </a:bodyPr>
           <a:lstStyle/>
-          <a:p>
-            <a:pPr algn="l">
-              <a:lnSpc>
-                <a:spcPts val="2500"/>
-              </a:lnSpc>
-            </a:pPr>
-            <a:r>
-              <a:rPr lang="en-US" sz="2000" spc="162">
-                <a:solidFill>
-                  <a:srgbClr val="000000"/>
-                </a:solidFill>
-                <a:latin typeface="TT Hoves"/>
-                <a:ea typeface="TT Hoves"/>
-                <a:cs typeface="TT Hoves"/>
-                <a:sym typeface="TT Hoves"/>
-              </a:rPr>
-              <a:t>Liceria</a:t>
-            </a:r>
-          </a:p>
-          <a:p>
-            <a:pPr algn="l">
-              <a:lnSpc>
-                <a:spcPts val="2500"/>
-              </a:lnSpc>
-            </a:pPr>
-            <a:r>
-              <a:rPr lang="en-US" sz="2000" spc="162">
-                <a:solidFill>
-                  <a:srgbClr val="000000"/>
-                </a:solidFill>
-                <a:latin typeface="TT Hoves"/>
-                <a:ea typeface="TT Hoves"/>
-                <a:cs typeface="TT Hoves"/>
-                <a:sym typeface="TT Hoves"/>
-              </a:rPr>
-              <a:t>&amp; Co.</a:t>
-            </a:r>
-          </a:p>
+          <a:p/>
         </p:txBody>
       </p:sp>
       <p:sp>
@@ -5004,25 +4622,7 @@
             <a:spAutoFit/>
           </a:bodyPr>
           <a:lstStyle/>
-          <a:p>
-            <a:pPr algn="l">
-              <a:lnSpc>
-                <a:spcPts val="12681"/>
-              </a:lnSpc>
-            </a:pPr>
-            <a:r>
-              <a:rPr lang="en-US" sz="11027" b="true">
-                <a:solidFill>
-                  <a:srgbClr val="000000"/>
-                </a:solidFill>
-                <a:latin typeface="TT Hoves Bold"/>
-                <a:ea typeface="TT Hoves Bold"/>
-                <a:cs typeface="TT Hoves Bold"/>
-                <a:sym typeface="TT Hoves Bold"/>
-              </a:rPr>
-              <a:t>Get In Touch</a:t>
-            </a:r>
-          </a:p>
+          <a:p/>
         </p:txBody>
       </p:sp>
       <p:sp>
@@ -5045,25 +4645,7 @@
             <a:spAutoFit/>
           </a:bodyPr>
           <a:lstStyle/>
-          <a:p>
-            <a:pPr algn="l">
-              <a:lnSpc>
-                <a:spcPts val="2860"/>
-              </a:lnSpc>
-            </a:pPr>
-            <a:r>
-              <a:rPr lang="en-US" sz="2000" spc="92">
-                <a:solidFill>
-                  <a:srgbClr val="000000"/>
-                </a:solidFill>
-                <a:latin typeface="TT Hoves"/>
-                <a:ea typeface="TT Hoves"/>
-                <a:cs typeface="TT Hoves"/>
-                <a:sym typeface="TT Hoves"/>
-              </a:rPr>
-              <a:t>+123-456-7890</a:t>
-            </a:r>
-          </a:p>
+          <a:p/>
         </p:txBody>
       </p:sp>
       <p:sp>
@@ -5086,25 +4668,7 @@
             <a:spAutoFit/>
           </a:bodyPr>
           <a:lstStyle/>
-          <a:p>
-            <a:pPr algn="l">
-              <a:lnSpc>
-                <a:spcPts val="2860"/>
-              </a:lnSpc>
-            </a:pPr>
-            <a:r>
-              <a:rPr lang="en-US" sz="2000" spc="92">
-                <a:solidFill>
-                  <a:srgbClr val="000000"/>
-                </a:solidFill>
-                <a:latin typeface="TT Hoves"/>
-                <a:ea typeface="TT Hoves"/>
-                <a:cs typeface="TT Hoves"/>
-                <a:sym typeface="TT Hoves"/>
-              </a:rPr>
-              <a:t>hello@reallygreatsite.com</a:t>
-            </a:r>
-          </a:p>
+          <a:p/>
         </p:txBody>
       </p:sp>
     </p:spTree>
@@ -5257,25 +4821,7 @@
             <a:spAutoFit/>
           </a:bodyPr>
           <a:lstStyle/>
-          <a:p>
-            <a:pPr algn="ctr">
-              <a:lnSpc>
-                <a:spcPts val="8625"/>
-              </a:lnSpc>
-            </a:pPr>
-            <a:r>
-              <a:rPr lang="en-US" sz="7500" b="true">
-                <a:solidFill>
-                  <a:srgbClr val="000000"/>
-                </a:solidFill>
-                <a:latin typeface="TT Hoves Bold"/>
-                <a:ea typeface="TT Hoves Bold"/>
-                <a:cs typeface="TT Hoves Bold"/>
-                <a:sym typeface="TT Hoves Bold"/>
-              </a:rPr>
-              <a:t>Welcome</a:t>
-            </a:r>
-          </a:p>
+          <a:p/>
         </p:txBody>
       </p:sp>
       <p:sp>
@@ -5298,28 +4844,7 @@
             <a:spAutoFit/>
           </a:bodyPr>
           <a:lstStyle/>
-          <a:p>
-            <a:pPr algn="ctr">
-              <a:lnSpc>
-                <a:spcPts val="2500"/>
-              </a:lnSpc>
-              <a:spcBef>
-                <a:spcPct val="0"/>
-              </a:spcBef>
-            </a:pPr>
-            <a:r>
-              <a:rPr lang="en-US" sz="2000" spc="162">
-                <a:solidFill>
-                  <a:srgbClr val="000000"/>
-                </a:solidFill>
-                <a:latin typeface="TT Hoves"/>
-                <a:ea typeface="TT Hoves"/>
-                <a:cs typeface="TT Hoves"/>
-                <a:sym typeface="TT Hoves"/>
-              </a:rPr>
-              <a:t>Lorem ipsum dolor sit amet, consectetur adipiscing elit, sed do eiusmod tempor incididunt ut labore et dolore magna aliqua. Ut enim ad minim veniam, quis nostrud exercitation ullamco laboris nisi ut aliquip ex ea commodo consequat. Duis aute irure dolor in reprehenderit in voluptate velit esse cillum dolore eu fugiat nulla pariatur. </a:t>
-            </a:r>
-          </a:p>
+          <a:p/>
         </p:txBody>
       </p:sp>
       <p:sp>
@@ -5342,44 +4867,7 @@
             <a:spAutoFit/>
           </a:bodyPr>
           <a:lstStyle/>
-          <a:p>
-            <a:pPr algn="l">
-              <a:lnSpc>
-                <a:spcPts val="2500"/>
-              </a:lnSpc>
-            </a:pPr>
-            <a:r>
-              <a:rPr lang="en-US" sz="2000" spc="162">
-                <a:solidFill>
-                  <a:srgbClr val="000000"/>
-                </a:solidFill>
-                <a:latin typeface="TT Hoves"/>
-                <a:ea typeface="TT Hoves"/>
-                <a:cs typeface="TT Hoves"/>
-                <a:sym typeface="TT Hoves"/>
-              </a:rPr>
-              <a:t>Liceria</a:t>
-            </a:r>
-          </a:p>
-          <a:p>
-            <a:pPr algn="l">
-              <a:lnSpc>
-                <a:spcPts val="2500"/>
-              </a:lnSpc>
-            </a:pPr>
-            <a:r>
-              <a:rPr lang="en-US" sz="2000" spc="162">
-                <a:solidFill>
-                  <a:srgbClr val="000000"/>
-                </a:solidFill>
-                <a:latin typeface="TT Hoves"/>
-                <a:ea typeface="TT Hoves"/>
-                <a:cs typeface="TT Hoves"/>
-                <a:sym typeface="TT Hoves"/>
-              </a:rPr>
-              <a:t>&amp; Co.</a:t>
-            </a:r>
-          </a:p>
+          <a:p/>
         </p:txBody>
       </p:sp>
       <p:sp>
@@ -5433,6 +4921,10 @@
             </a:stretch>
           </a:blipFill>
         </p:spPr>
+        <p:txBody>
+          <a:bodyPr/>
+          <a:p/>
+        </p:txBody>
       </p:sp>
       <p:sp>
         <p:nvSpPr>
@@ -5485,6 +4977,10 @@
             </a:stretch>
           </a:blipFill>
         </p:spPr>
+        <p:txBody>
+          <a:bodyPr/>
+          <a:p/>
+        </p:txBody>
       </p:sp>
     </p:spTree>
   </p:cSld>
@@ -5569,6 +5065,10 @@
             </a:stretch>
           </a:blipFill>
         </p:spPr>
+        <p:txBody>
+          <a:bodyPr/>
+          <a:p/>
+        </p:txBody>
       </p:sp>
       <p:sp>
         <p:nvSpPr>
@@ -5621,6 +5121,10 @@
             </a:stretch>
           </a:blipFill>
         </p:spPr>
+        <p:txBody>
+          <a:bodyPr/>
+          <a:p/>
+        </p:txBody>
       </p:sp>
       <p:grpSp>
         <p:nvGrpSpPr>
@@ -5862,6 +5366,10 @@
             </a:stretch>
           </a:blipFill>
         </p:spPr>
+        <p:txBody>
+          <a:bodyPr/>
+          <a:p/>
+        </p:txBody>
       </p:sp>
       <p:sp>
         <p:nvSpPr>
@@ -5883,44 +5391,7 @@
             <a:spAutoFit/>
           </a:bodyPr>
           <a:lstStyle/>
-          <a:p>
-            <a:pPr algn="l">
-              <a:lnSpc>
-                <a:spcPts val="2500"/>
-              </a:lnSpc>
-            </a:pPr>
-            <a:r>
-              <a:rPr lang="en-US" sz="2000" spc="162">
-                <a:solidFill>
-                  <a:srgbClr val="000000"/>
-                </a:solidFill>
-                <a:latin typeface="TT Hoves"/>
-                <a:ea typeface="TT Hoves"/>
-                <a:cs typeface="TT Hoves"/>
-                <a:sym typeface="TT Hoves"/>
-              </a:rPr>
-              <a:t>Liceria</a:t>
-            </a:r>
-          </a:p>
-          <a:p>
-            <a:pPr algn="l">
-              <a:lnSpc>
-                <a:spcPts val="2500"/>
-              </a:lnSpc>
-            </a:pPr>
-            <a:r>
-              <a:rPr lang="en-US" sz="2000" spc="162">
-                <a:solidFill>
-                  <a:srgbClr val="000000"/>
-                </a:solidFill>
-                <a:latin typeface="TT Hoves"/>
-                <a:ea typeface="TT Hoves"/>
-                <a:cs typeface="TT Hoves"/>
-                <a:sym typeface="TT Hoves"/>
-              </a:rPr>
-              <a:t>&amp; Co.</a:t>
-            </a:r>
-          </a:p>
+          <a:p/>
         </p:txBody>
       </p:sp>
       <p:sp>
@@ -5943,25 +5414,7 @@
             <a:spAutoFit/>
           </a:bodyPr>
           <a:lstStyle/>
-          <a:p>
-            <a:pPr algn="l">
-              <a:lnSpc>
-                <a:spcPts val="8625"/>
-              </a:lnSpc>
-            </a:pPr>
-            <a:r>
-              <a:rPr lang="en-US" sz="7500" b="true">
-                <a:solidFill>
-                  <a:srgbClr val="000000"/>
-                </a:solidFill>
-                <a:latin typeface="TT Hoves Bold"/>
-                <a:ea typeface="TT Hoves Bold"/>
-                <a:cs typeface="TT Hoves Bold"/>
-                <a:sym typeface="TT Hoves Bold"/>
-              </a:rPr>
-              <a:t>About us</a:t>
-            </a:r>
-          </a:p>
+          <a:p/>
         </p:txBody>
       </p:sp>
       <p:sp>
@@ -5984,28 +5437,7 @@
             <a:spAutoFit/>
           </a:bodyPr>
           <a:lstStyle/>
-          <a:p>
-            <a:pPr algn="l">
-              <a:lnSpc>
-                <a:spcPts val="2500"/>
-              </a:lnSpc>
-              <a:spcBef>
-                <a:spcPct val="0"/>
-              </a:spcBef>
-            </a:pPr>
-            <a:r>
-              <a:rPr lang="en-US" sz="2000">
-                <a:solidFill>
-                  <a:srgbClr val="000000"/>
-                </a:solidFill>
-                <a:latin typeface="TT Hoves"/>
-                <a:ea typeface="TT Hoves"/>
-                <a:cs typeface="TT Hoves"/>
-                <a:sym typeface="TT Hoves"/>
-              </a:rPr>
-              <a:t>Lorem ipsum dolor sit amet, consectetur adipiscing elit, sed do eiusmod tempor incididunt ut labore et dolore magna aliqua. Ut enim ad minim veniam, quis nostrud exercitation ullamco laboris nisi ut aliquip ex ea commodo consequat. Duis aute irure dolor in reprehenderit in voluptate velit esse cillum dolore eu fugiat nulla pariatur. </a:t>
-            </a:r>
-          </a:p>
+          <a:p/>
         </p:txBody>
       </p:sp>
     </p:spTree>
@@ -6084,6 +5516,10 @@
             </a:stretch>
           </a:blipFill>
         </p:spPr>
+        <p:txBody>
+          <a:bodyPr/>
+          <a:p/>
+        </p:txBody>
       </p:sp>
       <p:grpSp>
         <p:nvGrpSpPr>
@@ -6405,6 +5841,10 @@
             </a:stretch>
           </a:blipFill>
         </p:spPr>
+        <p:txBody>
+          <a:bodyPr/>
+          <a:p/>
+        </p:txBody>
       </p:sp>
       <p:sp>
         <p:nvSpPr>
@@ -6457,6 +5897,10 @@
             </a:stretch>
           </a:blipFill>
         </p:spPr>
+        <p:txBody>
+          <a:bodyPr/>
+          <a:p/>
+        </p:txBody>
       </p:sp>
       <p:sp>
         <p:nvSpPr>
@@ -6478,25 +5922,7 @@
             <a:spAutoFit/>
           </a:bodyPr>
           <a:lstStyle/>
-          <a:p>
-            <a:pPr algn="l">
-              <a:lnSpc>
-                <a:spcPts val="8625"/>
-              </a:lnSpc>
-            </a:pPr>
-            <a:r>
-              <a:rPr lang="en-US" sz="7500" b="true">
-                <a:solidFill>
-                  <a:srgbClr val="000000"/>
-                </a:solidFill>
-                <a:latin typeface="TT Hoves Bold"/>
-                <a:ea typeface="TT Hoves Bold"/>
-                <a:cs typeface="TT Hoves Bold"/>
-                <a:sym typeface="TT Hoves Bold"/>
-              </a:rPr>
-              <a:t>Vision and Mission</a:t>
-            </a:r>
-          </a:p>
+          <a:p/>
         </p:txBody>
       </p:sp>
       <p:sp>
@@ -6519,44 +5945,7 @@
             <a:spAutoFit/>
           </a:bodyPr>
           <a:lstStyle/>
-          <a:p>
-            <a:pPr algn="l">
-              <a:lnSpc>
-                <a:spcPts val="2500"/>
-              </a:lnSpc>
-            </a:pPr>
-            <a:r>
-              <a:rPr lang="en-US" sz="2000" spc="162">
-                <a:solidFill>
-                  <a:srgbClr val="000000"/>
-                </a:solidFill>
-                <a:latin typeface="TT Hoves"/>
-                <a:ea typeface="TT Hoves"/>
-                <a:cs typeface="TT Hoves"/>
-                <a:sym typeface="TT Hoves"/>
-              </a:rPr>
-              <a:t>Liceria</a:t>
-            </a:r>
-          </a:p>
-          <a:p>
-            <a:pPr algn="l">
-              <a:lnSpc>
-                <a:spcPts val="2500"/>
-              </a:lnSpc>
-            </a:pPr>
-            <a:r>
-              <a:rPr lang="en-US" sz="2000" spc="162">
-                <a:solidFill>
-                  <a:srgbClr val="000000"/>
-                </a:solidFill>
-                <a:latin typeface="TT Hoves"/>
-                <a:ea typeface="TT Hoves"/>
-                <a:cs typeface="TT Hoves"/>
-                <a:sym typeface="TT Hoves"/>
-              </a:rPr>
-              <a:t>&amp; Co.</a:t>
-            </a:r>
-          </a:p>
+          <a:p/>
         </p:txBody>
       </p:sp>
       <p:sp>
@@ -6579,25 +5968,7 @@
             <a:spAutoFit/>
           </a:bodyPr>
           <a:lstStyle/>
-          <a:p>
-            <a:pPr algn="l">
-              <a:lnSpc>
-                <a:spcPts val="2874"/>
-              </a:lnSpc>
-            </a:pPr>
-            <a:r>
-              <a:rPr lang="en-US" sz="2499" b="true">
-                <a:solidFill>
-                  <a:srgbClr val="000000"/>
-                </a:solidFill>
-                <a:latin typeface="TT Hoves Bold"/>
-                <a:ea typeface="TT Hoves Bold"/>
-                <a:cs typeface="TT Hoves Bold"/>
-                <a:sym typeface="TT Hoves Bold"/>
-              </a:rPr>
-              <a:t>Vision Statement</a:t>
-            </a:r>
-          </a:p>
+          <a:p/>
         </p:txBody>
       </p:sp>
       <p:sp>
@@ -6620,25 +5991,7 @@
             <a:spAutoFit/>
           </a:bodyPr>
           <a:lstStyle/>
-          <a:p>
-            <a:pPr algn="l">
-              <a:lnSpc>
-                <a:spcPts val="2874"/>
-              </a:lnSpc>
-            </a:pPr>
-            <a:r>
-              <a:rPr lang="en-US" sz="2499" b="true">
-                <a:solidFill>
-                  <a:srgbClr val="000000"/>
-                </a:solidFill>
-                <a:latin typeface="TT Hoves Bold"/>
-                <a:ea typeface="TT Hoves Bold"/>
-                <a:cs typeface="TT Hoves Bold"/>
-                <a:sym typeface="TT Hoves Bold"/>
-              </a:rPr>
-              <a:t>Mission Statement</a:t>
-            </a:r>
-          </a:p>
+          <a:p/>
         </p:txBody>
       </p:sp>
       <p:sp>
@@ -6661,28 +6014,7 @@
             <a:spAutoFit/>
           </a:bodyPr>
           <a:lstStyle/>
-          <a:p>
-            <a:pPr algn="l">
-              <a:lnSpc>
-                <a:spcPts val="2500"/>
-              </a:lnSpc>
-              <a:spcBef>
-                <a:spcPct val="0"/>
-              </a:spcBef>
-            </a:pPr>
-            <a:r>
-              <a:rPr lang="en-US" sz="2000">
-                <a:solidFill>
-                  <a:srgbClr val="000000"/>
-                </a:solidFill>
-                <a:latin typeface="TT Hoves"/>
-                <a:ea typeface="TT Hoves"/>
-                <a:cs typeface="TT Hoves"/>
-                <a:sym typeface="TT Hoves"/>
-              </a:rPr>
-              <a:t>Lorem ipsum dolor sit amet, consectetur adipiscing elit, sed do eiusmod tempor incididunt ut labore et dolore magna aliqua. Ut enim ad minim veniam.</a:t>
-            </a:r>
-          </a:p>
+          <a:p/>
         </p:txBody>
       </p:sp>
       <p:sp>
@@ -6705,28 +6037,7 @@
             <a:spAutoFit/>
           </a:bodyPr>
           <a:lstStyle/>
-          <a:p>
-            <a:pPr algn="l">
-              <a:lnSpc>
-                <a:spcPts val="2500"/>
-              </a:lnSpc>
-              <a:spcBef>
-                <a:spcPct val="0"/>
-              </a:spcBef>
-            </a:pPr>
-            <a:r>
-              <a:rPr lang="en-US" sz="2000">
-                <a:solidFill>
-                  <a:srgbClr val="000000"/>
-                </a:solidFill>
-                <a:latin typeface="TT Hoves"/>
-                <a:ea typeface="TT Hoves"/>
-                <a:cs typeface="TT Hoves"/>
-                <a:sym typeface="TT Hoves"/>
-              </a:rPr>
-              <a:t>Lorem ipsum dolor sit amet, consectetur adipiscing elit, sed do eiusmod tempor incididunt ut labore et dolore magna aliqua. Ut enim ad minim veniam.</a:t>
-            </a:r>
-          </a:p>
+          <a:p/>
         </p:txBody>
       </p:sp>
       <p:sp>
@@ -6780,6 +6091,10 @@
             </a:stretch>
           </a:blipFill>
         </p:spPr>
+        <p:txBody>
+          <a:bodyPr/>
+          <a:p/>
+        </p:txBody>
       </p:sp>
     </p:spTree>
   </p:cSld>
@@ -6864,6 +6179,10 @@
             </a:stretch>
           </a:blipFill>
         </p:spPr>
+        <p:txBody>
+          <a:bodyPr/>
+          <a:p/>
+        </p:txBody>
       </p:sp>
       <p:grpSp>
         <p:nvGrpSpPr>
@@ -6970,44 +6289,7 @@
             <a:spAutoFit/>
           </a:bodyPr>
           <a:lstStyle/>
-          <a:p>
-            <a:pPr algn="l">
-              <a:lnSpc>
-                <a:spcPts val="2500"/>
-              </a:lnSpc>
-            </a:pPr>
-            <a:r>
-              <a:rPr lang="en-US" sz="2000" spc="162">
-                <a:solidFill>
-                  <a:srgbClr val="000000"/>
-                </a:solidFill>
-                <a:latin typeface="TT Hoves"/>
-                <a:ea typeface="TT Hoves"/>
-                <a:cs typeface="TT Hoves"/>
-                <a:sym typeface="TT Hoves"/>
-              </a:rPr>
-              <a:t>Liceria</a:t>
-            </a:r>
-          </a:p>
-          <a:p>
-            <a:pPr algn="l">
-              <a:lnSpc>
-                <a:spcPts val="2500"/>
-              </a:lnSpc>
-            </a:pPr>
-            <a:r>
-              <a:rPr lang="en-US" sz="2000" spc="162">
-                <a:solidFill>
-                  <a:srgbClr val="000000"/>
-                </a:solidFill>
-                <a:latin typeface="TT Hoves"/>
-                <a:ea typeface="TT Hoves"/>
-                <a:cs typeface="TT Hoves"/>
-                <a:sym typeface="TT Hoves"/>
-              </a:rPr>
-              <a:t>&amp; Co.</a:t>
-            </a:r>
-          </a:p>
+          <a:p/>
         </p:txBody>
       </p:sp>
       <p:sp>
@@ -7030,25 +6312,7 @@
             <a:spAutoFit/>
           </a:bodyPr>
           <a:lstStyle/>
-          <a:p>
-            <a:pPr algn="l">
-              <a:lnSpc>
-                <a:spcPts val="8625"/>
-              </a:lnSpc>
-            </a:pPr>
-            <a:r>
-              <a:rPr lang="en-US" sz="7500" b="true">
-                <a:solidFill>
-                  <a:srgbClr val="000000"/>
-                </a:solidFill>
-                <a:latin typeface="TT Hoves Bold"/>
-                <a:ea typeface="TT Hoves Bold"/>
-                <a:cs typeface="TT Hoves Bold"/>
-                <a:sym typeface="TT Hoves Bold"/>
-              </a:rPr>
-              <a:t>Timeline Story</a:t>
-            </a:r>
-          </a:p>
+          <a:p/>
         </p:txBody>
       </p:sp>
       <p:sp>
@@ -7071,28 +6335,7 @@
             <a:spAutoFit/>
           </a:bodyPr>
           <a:lstStyle/>
-          <a:p>
-            <a:pPr algn="l">
-              <a:lnSpc>
-                <a:spcPts val="2500"/>
-              </a:lnSpc>
-              <a:spcBef>
-                <a:spcPct val="0"/>
-              </a:spcBef>
-            </a:pPr>
-            <a:r>
-              <a:rPr lang="en-US" sz="2000">
-                <a:solidFill>
-                  <a:srgbClr val="000000"/>
-                </a:solidFill>
-                <a:latin typeface="TT Hoves"/>
-                <a:ea typeface="TT Hoves"/>
-                <a:cs typeface="TT Hoves"/>
-                <a:sym typeface="TT Hoves"/>
-              </a:rPr>
-              <a:t>Lorem ipsum dolor sit amet, consectetur adipiscing elit, sed do eiusmod tempor incididunt ut labore et dolore magna aliqua. Ut enim ad minim veniam.</a:t>
-            </a:r>
-          </a:p>
+          <a:p/>
         </p:txBody>
       </p:sp>
       <p:sp>
@@ -7115,28 +6358,7 @@
             <a:spAutoFit/>
           </a:bodyPr>
           <a:lstStyle/>
-          <a:p>
-            <a:pPr algn="l">
-              <a:lnSpc>
-                <a:spcPts val="2500"/>
-              </a:lnSpc>
-              <a:spcBef>
-                <a:spcPct val="0"/>
-              </a:spcBef>
-            </a:pPr>
-            <a:r>
-              <a:rPr lang="en-US" sz="2000">
-                <a:solidFill>
-                  <a:srgbClr val="000000"/>
-                </a:solidFill>
-                <a:latin typeface="TT Hoves"/>
-                <a:ea typeface="TT Hoves"/>
-                <a:cs typeface="TT Hoves"/>
-                <a:sym typeface="TT Hoves"/>
-              </a:rPr>
-              <a:t>Lorem ipsum dolor sit amet, consectetur adipiscing elit, sed do eiusmod tempor incididunt ut labore et dolore magna aliqua. Ut enim ad minim veniam.</a:t>
-            </a:r>
-          </a:p>
+          <a:p/>
         </p:txBody>
       </p:sp>
       <p:sp>
@@ -7159,28 +6381,7 @@
             <a:spAutoFit/>
           </a:bodyPr>
           <a:lstStyle/>
-          <a:p>
-            <a:pPr algn="l">
-              <a:lnSpc>
-                <a:spcPts val="2500"/>
-              </a:lnSpc>
-              <a:spcBef>
-                <a:spcPct val="0"/>
-              </a:spcBef>
-            </a:pPr>
-            <a:r>
-              <a:rPr lang="en-US" sz="2000">
-                <a:solidFill>
-                  <a:srgbClr val="000000"/>
-                </a:solidFill>
-                <a:latin typeface="TT Hoves"/>
-                <a:ea typeface="TT Hoves"/>
-                <a:cs typeface="TT Hoves"/>
-                <a:sym typeface="TT Hoves"/>
-              </a:rPr>
-              <a:t>Lorem ipsum dolor sit amet, consectetur adipiscing elit, sed do eiusmod tempor incididunt ut labore et dolore magna aliqua. Ut enim ad minim veniam.</a:t>
-            </a:r>
-          </a:p>
+          <a:p/>
         </p:txBody>
       </p:sp>
       <p:sp>
@@ -7203,25 +6404,7 @@
             <a:spAutoFit/>
           </a:bodyPr>
           <a:lstStyle/>
-          <a:p>
-            <a:pPr algn="l">
-              <a:lnSpc>
-                <a:spcPts val="2874"/>
-              </a:lnSpc>
-            </a:pPr>
-            <a:r>
-              <a:rPr lang="en-US" sz="2499" b="true">
-                <a:solidFill>
-                  <a:srgbClr val="000000"/>
-                </a:solidFill>
-                <a:latin typeface="TT Hoves Bold"/>
-                <a:ea typeface="TT Hoves Bold"/>
-                <a:cs typeface="TT Hoves Bold"/>
-                <a:sym typeface="TT Hoves Bold"/>
-              </a:rPr>
-              <a:t>1998 - 2008</a:t>
-            </a:r>
-          </a:p>
+          <a:p/>
         </p:txBody>
       </p:sp>
       <p:sp>
@@ -7244,25 +6427,7 @@
             <a:spAutoFit/>
           </a:bodyPr>
           <a:lstStyle/>
-          <a:p>
-            <a:pPr algn="l">
-              <a:lnSpc>
-                <a:spcPts val="2874"/>
-              </a:lnSpc>
-            </a:pPr>
-            <a:r>
-              <a:rPr lang="en-US" sz="2499" b="true">
-                <a:solidFill>
-                  <a:srgbClr val="000000"/>
-                </a:solidFill>
-                <a:latin typeface="TT Hoves Bold"/>
-                <a:ea typeface="TT Hoves Bold"/>
-                <a:cs typeface="TT Hoves Bold"/>
-                <a:sym typeface="TT Hoves Bold"/>
-              </a:rPr>
-              <a:t>2008 - 2018</a:t>
-            </a:r>
-          </a:p>
+          <a:p/>
         </p:txBody>
       </p:sp>
       <p:sp>
@@ -7285,25 +6450,7 @@
             <a:spAutoFit/>
           </a:bodyPr>
           <a:lstStyle/>
-          <a:p>
-            <a:pPr algn="l">
-              <a:lnSpc>
-                <a:spcPts val="2874"/>
-              </a:lnSpc>
-            </a:pPr>
-            <a:r>
-              <a:rPr lang="en-US" sz="2499" b="true">
-                <a:solidFill>
-                  <a:srgbClr val="000000"/>
-                </a:solidFill>
-                <a:latin typeface="TT Hoves Bold"/>
-                <a:ea typeface="TT Hoves Bold"/>
-                <a:cs typeface="TT Hoves Bold"/>
-                <a:sym typeface="TT Hoves Bold"/>
-              </a:rPr>
-              <a:t>2018 - Now</a:t>
-            </a:r>
-          </a:p>
+          <a:p/>
         </p:txBody>
       </p:sp>
       <p:sp>
@@ -7329,6 +6476,10 @@
             <a:tailEnd type="none" len="sm" w="sm"/>
           </a:ln>
         </p:spPr>
+        <p:txBody>
+          <a:bodyPr/>
+          <a:p/>
+        </p:txBody>
       </p:sp>
       <p:sp>
         <p:nvSpPr>
@@ -7353,6 +6504,10 @@
             <a:tailEnd type="arrow" len="sm" w="med"/>
           </a:ln>
         </p:spPr>
+        <p:txBody>
+          <a:bodyPr/>
+          <a:p/>
+        </p:txBody>
       </p:sp>
       <p:sp>
         <p:nvSpPr>
@@ -7377,6 +6532,10 @@
             <a:tailEnd type="arrow" len="sm" w="med"/>
           </a:ln>
         </p:spPr>
+        <p:txBody>
+          <a:bodyPr/>
+          <a:p/>
+        </p:txBody>
       </p:sp>
       <p:sp>
         <p:nvSpPr>
@@ -7401,6 +6560,10 @@
             <a:tailEnd type="arrow" len="sm" w="med"/>
           </a:ln>
         </p:spPr>
+        <p:txBody>
+          <a:bodyPr/>
+          <a:p/>
+        </p:txBody>
       </p:sp>
       <p:sp>
         <p:nvSpPr>
@@ -7453,6 +6616,10 @@
             </a:stretch>
           </a:blipFill>
         </p:spPr>
+        <p:txBody>
+          <a:bodyPr/>
+          <a:p/>
+        </p:txBody>
       </p:sp>
     </p:spTree>
   </p:cSld>
@@ -7537,6 +6704,10 @@
             </a:stretch>
           </a:blipFill>
         </p:spPr>
+        <p:txBody>
+          <a:bodyPr/>
+          <a:p/>
+        </p:txBody>
       </p:sp>
       <p:sp>
         <p:nvSpPr>
@@ -7589,6 +6760,10 @@
             </a:stretch>
           </a:blipFill>
         </p:spPr>
+        <p:txBody>
+          <a:bodyPr/>
+          <a:p/>
+        </p:txBody>
       </p:sp>
       <p:sp>
         <p:nvSpPr>
@@ -7641,6 +6816,10 @@
             </a:stretch>
           </a:blipFill>
         </p:spPr>
+        <p:txBody>
+          <a:bodyPr/>
+          <a:p/>
+        </p:txBody>
       </p:sp>
       <p:grpSp>
         <p:nvGrpSpPr>
@@ -8010,6 +7189,10 @@
             </a:stretch>
           </a:blipFill>
         </p:spPr>
+        <p:txBody>
+          <a:bodyPr/>
+          <a:p/>
+        </p:txBody>
       </p:sp>
       <p:grpSp>
         <p:nvGrpSpPr>
@@ -8361,44 +7544,7 @@
             <a:spAutoFit/>
           </a:bodyPr>
           <a:lstStyle/>
-          <a:p>
-            <a:pPr algn="l">
-              <a:lnSpc>
-                <a:spcPts val="2500"/>
-              </a:lnSpc>
-            </a:pPr>
-            <a:r>
-              <a:rPr lang="en-US" sz="2000" spc="162">
-                <a:solidFill>
-                  <a:srgbClr val="000000"/>
-                </a:solidFill>
-                <a:latin typeface="TT Hoves"/>
-                <a:ea typeface="TT Hoves"/>
-                <a:cs typeface="TT Hoves"/>
-                <a:sym typeface="TT Hoves"/>
-              </a:rPr>
-              <a:t>Liceria</a:t>
-            </a:r>
-          </a:p>
-          <a:p>
-            <a:pPr algn="l">
-              <a:lnSpc>
-                <a:spcPts val="2500"/>
-              </a:lnSpc>
-            </a:pPr>
-            <a:r>
-              <a:rPr lang="en-US" sz="2000" spc="162">
-                <a:solidFill>
-                  <a:srgbClr val="000000"/>
-                </a:solidFill>
-                <a:latin typeface="TT Hoves"/>
-                <a:ea typeface="TT Hoves"/>
-                <a:cs typeface="TT Hoves"/>
-                <a:sym typeface="TT Hoves"/>
-              </a:rPr>
-              <a:t>&amp; Co.</a:t>
-            </a:r>
-          </a:p>
+          <a:p/>
         </p:txBody>
       </p:sp>
       <p:sp>
@@ -8421,25 +7567,7 @@
             <a:spAutoFit/>
           </a:bodyPr>
           <a:lstStyle/>
-          <a:p>
-            <a:pPr algn="ctr">
-              <a:lnSpc>
-                <a:spcPts val="8625"/>
-              </a:lnSpc>
-            </a:pPr>
-            <a:r>
-              <a:rPr lang="en-US" sz="7500" b="true">
-                <a:solidFill>
-                  <a:srgbClr val="000000"/>
-                </a:solidFill>
-                <a:latin typeface="TT Hoves Bold"/>
-                <a:ea typeface="TT Hoves Bold"/>
-                <a:cs typeface="TT Hoves Bold"/>
-                <a:sym typeface="TT Hoves Bold"/>
-              </a:rPr>
-              <a:t>Our Best Team</a:t>
-            </a:r>
-          </a:p>
+          <a:p/>
         </p:txBody>
       </p:sp>
       <p:sp>
@@ -8462,25 +7590,7 @@
             <a:spAutoFit/>
           </a:bodyPr>
           <a:lstStyle/>
-          <a:p>
-            <a:pPr algn="ctr">
-              <a:lnSpc>
-                <a:spcPts val="2874"/>
-              </a:lnSpc>
-            </a:pPr>
-            <a:r>
-              <a:rPr lang="en-US" sz="2499" b="true">
-                <a:solidFill>
-                  <a:srgbClr val="000000"/>
-                </a:solidFill>
-                <a:latin typeface="TT Hoves Bold"/>
-                <a:ea typeface="TT Hoves Bold"/>
-                <a:cs typeface="TT Hoves Bold"/>
-                <a:sym typeface="TT Hoves Bold"/>
-              </a:rPr>
-              <a:t>Samira Hadid</a:t>
-            </a:r>
-          </a:p>
+          <a:p/>
         </p:txBody>
       </p:sp>
       <p:sp>
@@ -8503,25 +7613,7 @@
             <a:spAutoFit/>
           </a:bodyPr>
           <a:lstStyle/>
-          <a:p>
-            <a:pPr algn="ctr">
-              <a:lnSpc>
-                <a:spcPts val="2874"/>
-              </a:lnSpc>
-            </a:pPr>
-            <a:r>
-              <a:rPr lang="en-US" sz="2499" b="true">
-                <a:solidFill>
-                  <a:srgbClr val="000000"/>
-                </a:solidFill>
-                <a:latin typeface="TT Hoves Bold"/>
-                <a:ea typeface="TT Hoves Bold"/>
-                <a:cs typeface="TT Hoves Bold"/>
-                <a:sym typeface="TT Hoves Bold"/>
-              </a:rPr>
-              <a:t>Reese Miller</a:t>
-            </a:r>
-          </a:p>
+          <a:p/>
         </p:txBody>
       </p:sp>
       <p:sp>
@@ -8544,25 +7636,7 @@
             <a:spAutoFit/>
           </a:bodyPr>
           <a:lstStyle/>
-          <a:p>
-            <a:pPr algn="ctr">
-              <a:lnSpc>
-                <a:spcPts val="2874"/>
-              </a:lnSpc>
-            </a:pPr>
-            <a:r>
-              <a:rPr lang="en-US" sz="2499" b="true">
-                <a:solidFill>
-                  <a:srgbClr val="000000"/>
-                </a:solidFill>
-                <a:latin typeface="TT Hoves Bold"/>
-                <a:ea typeface="TT Hoves Bold"/>
-                <a:cs typeface="TT Hoves Bold"/>
-                <a:sym typeface="TT Hoves Bold"/>
-              </a:rPr>
-              <a:t>Olivia Wilson</a:t>
-            </a:r>
-          </a:p>
+          <a:p/>
         </p:txBody>
       </p:sp>
     </p:spTree>
@@ -8642,6 +7716,10 @@
             </a:stretch>
           </a:blipFill>
         </p:spPr>
+        <p:txBody>
+          <a:bodyPr/>
+          <a:p/>
+        </p:txBody>
       </p:sp>
       <p:grpSp>
         <p:nvGrpSpPr>
@@ -8804,6 +7882,10 @@
             </a:stretch>
           </a:blipFill>
         </p:spPr>
+        <p:txBody>
+          <a:bodyPr/>
+          <a:p/>
+        </p:txBody>
       </p:sp>
       <p:sp>
         <p:nvSpPr>
@@ -8856,6 +7938,10 @@
             </a:stretch>
           </a:blipFill>
         </p:spPr>
+        <p:txBody>
+          <a:bodyPr/>
+          <a:p/>
+        </p:txBody>
       </p:sp>
       <p:sp>
         <p:nvSpPr>
@@ -8877,25 +7963,7 @@
             <a:spAutoFit/>
           </a:bodyPr>
           <a:lstStyle/>
-          <a:p>
-            <a:pPr algn="l">
-              <a:lnSpc>
-                <a:spcPts val="8625"/>
-              </a:lnSpc>
-            </a:pPr>
-            <a:r>
-              <a:rPr lang="en-US" sz="7500" b="true">
-                <a:solidFill>
-                  <a:srgbClr val="000000"/>
-                </a:solidFill>
-                <a:latin typeface="TT Hoves Bold"/>
-                <a:ea typeface="TT Hoves Bold"/>
-                <a:cs typeface="TT Hoves Bold"/>
-                <a:sym typeface="TT Hoves Bold"/>
-              </a:rPr>
-              <a:t>Break Section</a:t>
-            </a:r>
-          </a:p>
+          <a:p/>
         </p:txBody>
       </p:sp>
       <p:sp>
@@ -8918,44 +7986,7 @@
             <a:spAutoFit/>
           </a:bodyPr>
           <a:lstStyle/>
-          <a:p>
-            <a:pPr algn="l">
-              <a:lnSpc>
-                <a:spcPts val="2500"/>
-              </a:lnSpc>
-            </a:pPr>
-            <a:r>
-              <a:rPr lang="en-US" sz="2000" spc="162">
-                <a:solidFill>
-                  <a:srgbClr val="FFFFFF"/>
-                </a:solidFill>
-                <a:latin typeface="TT Hoves"/>
-                <a:ea typeface="TT Hoves"/>
-                <a:cs typeface="TT Hoves"/>
-                <a:sym typeface="TT Hoves"/>
-              </a:rPr>
-              <a:t>Liceria</a:t>
-            </a:r>
-          </a:p>
-          <a:p>
-            <a:pPr algn="l">
-              <a:lnSpc>
-                <a:spcPts val="2500"/>
-              </a:lnSpc>
-            </a:pPr>
-            <a:r>
-              <a:rPr lang="en-US" sz="2000" spc="162">
-                <a:solidFill>
-                  <a:srgbClr val="FFFFFF"/>
-                </a:solidFill>
-                <a:latin typeface="TT Hoves"/>
-                <a:ea typeface="TT Hoves"/>
-                <a:cs typeface="TT Hoves"/>
-                <a:sym typeface="TT Hoves"/>
-              </a:rPr>
-              <a:t>&amp; Co.</a:t>
-            </a:r>
-          </a:p>
+          <a:p/>
         </p:txBody>
       </p:sp>
     </p:spTree>
@@ -9119,6 +8150,10 @@
             </a:stretch>
           </a:blipFill>
         </p:spPr>
+        <p:txBody>
+          <a:bodyPr/>
+          <a:p/>
+        </p:txBody>
       </p:sp>
       <p:grpSp>
         <p:nvGrpSpPr>
@@ -9560,44 +8595,7 @@
             <a:spAutoFit/>
           </a:bodyPr>
           <a:lstStyle/>
-          <a:p>
-            <a:pPr algn="l">
-              <a:lnSpc>
-                <a:spcPts val="2500"/>
-              </a:lnSpc>
-            </a:pPr>
-            <a:r>
-              <a:rPr lang="en-US" sz="2000" spc="162">
-                <a:solidFill>
-                  <a:srgbClr val="000000"/>
-                </a:solidFill>
-                <a:latin typeface="TT Hoves"/>
-                <a:ea typeface="TT Hoves"/>
-                <a:cs typeface="TT Hoves"/>
-                <a:sym typeface="TT Hoves"/>
-              </a:rPr>
-              <a:t>Liceria</a:t>
-            </a:r>
-          </a:p>
-          <a:p>
-            <a:pPr algn="l">
-              <a:lnSpc>
-                <a:spcPts val="2500"/>
-              </a:lnSpc>
-            </a:pPr>
-            <a:r>
-              <a:rPr lang="en-US" sz="2000" spc="162">
-                <a:solidFill>
-                  <a:srgbClr val="000000"/>
-                </a:solidFill>
-                <a:latin typeface="TT Hoves"/>
-                <a:ea typeface="TT Hoves"/>
-                <a:cs typeface="TT Hoves"/>
-                <a:sym typeface="TT Hoves"/>
-              </a:rPr>
-              <a:t>&amp; Co.</a:t>
-            </a:r>
-          </a:p>
+          <a:p/>
         </p:txBody>
       </p:sp>
       <p:sp>
@@ -9620,25 +8618,7 @@
             <a:spAutoFit/>
           </a:bodyPr>
           <a:lstStyle/>
-          <a:p>
-            <a:pPr algn="r">
-              <a:lnSpc>
-                <a:spcPts val="8625"/>
-              </a:lnSpc>
-            </a:pPr>
-            <a:r>
-              <a:rPr lang="en-US" sz="7500" b="true">
-                <a:solidFill>
-                  <a:srgbClr val="000000"/>
-                </a:solidFill>
-                <a:latin typeface="TT Hoves Bold"/>
-                <a:ea typeface="TT Hoves Bold"/>
-                <a:cs typeface="TT Hoves Bold"/>
-                <a:sym typeface="TT Hoves Bold"/>
-              </a:rPr>
-              <a:t>Our Services</a:t>
-            </a:r>
-          </a:p>
+          <a:p/>
         </p:txBody>
       </p:sp>
       <p:sp>
@@ -9661,28 +8641,7 @@
             <a:spAutoFit/>
           </a:bodyPr>
           <a:lstStyle/>
-          <a:p>
-            <a:pPr algn="l">
-              <a:lnSpc>
-                <a:spcPts val="2500"/>
-              </a:lnSpc>
-              <a:spcBef>
-                <a:spcPct val="0"/>
-              </a:spcBef>
-            </a:pPr>
-            <a:r>
-              <a:rPr lang="en-US" sz="2000">
-                <a:solidFill>
-                  <a:srgbClr val="000000"/>
-                </a:solidFill>
-                <a:latin typeface="TT Hoves"/>
-                <a:ea typeface="TT Hoves"/>
-                <a:cs typeface="TT Hoves"/>
-                <a:sym typeface="TT Hoves"/>
-              </a:rPr>
-              <a:t>Lorem ipsum dolor sit amet, consectetur adipiscing elit, sed do eiusmod tempor incididunt ut labore et dolore magna aliqua.</a:t>
-            </a:r>
-          </a:p>
+          <a:p/>
         </p:txBody>
       </p:sp>
       <p:sp>
@@ -9705,28 +8664,7 @@
             <a:spAutoFit/>
           </a:bodyPr>
           <a:lstStyle/>
-          <a:p>
-            <a:pPr algn="l">
-              <a:lnSpc>
-                <a:spcPts val="2500"/>
-              </a:lnSpc>
-              <a:spcBef>
-                <a:spcPct val="0"/>
-              </a:spcBef>
-            </a:pPr>
-            <a:r>
-              <a:rPr lang="en-US" sz="2000">
-                <a:solidFill>
-                  <a:srgbClr val="000000"/>
-                </a:solidFill>
-                <a:latin typeface="TT Hoves"/>
-                <a:ea typeface="TT Hoves"/>
-                <a:cs typeface="TT Hoves"/>
-                <a:sym typeface="TT Hoves"/>
-              </a:rPr>
-              <a:t>Lorem ipsum dolor sit amet, consectetur adipiscing elit, sed do eiusmod tempor incididunt ut labore et dolore magna aliqua.</a:t>
-            </a:r>
-          </a:p>
+          <a:p/>
         </p:txBody>
       </p:sp>
       <p:sp>
@@ -9749,28 +8687,7 @@
             <a:spAutoFit/>
           </a:bodyPr>
           <a:lstStyle/>
-          <a:p>
-            <a:pPr algn="l">
-              <a:lnSpc>
-                <a:spcPts val="2500"/>
-              </a:lnSpc>
-              <a:spcBef>
-                <a:spcPct val="0"/>
-              </a:spcBef>
-            </a:pPr>
-            <a:r>
-              <a:rPr lang="en-US" sz="2000">
-                <a:solidFill>
-                  <a:srgbClr val="000000"/>
-                </a:solidFill>
-                <a:latin typeface="TT Hoves"/>
-                <a:ea typeface="TT Hoves"/>
-                <a:cs typeface="TT Hoves"/>
-                <a:sym typeface="TT Hoves"/>
-              </a:rPr>
-              <a:t>Lorem ipsum dolor sit amet, consectetur adipiscing elit, sed do eiusmod tempor incididunt ut labore et dolore magna aliqua.</a:t>
-            </a:r>
-          </a:p>
+          <a:p/>
         </p:txBody>
       </p:sp>
       <p:sp>
@@ -9793,28 +8710,7 @@
             <a:spAutoFit/>
           </a:bodyPr>
           <a:lstStyle/>
-          <a:p>
-            <a:pPr algn="l">
-              <a:lnSpc>
-                <a:spcPts val="2500"/>
-              </a:lnSpc>
-              <a:spcBef>
-                <a:spcPct val="0"/>
-              </a:spcBef>
-            </a:pPr>
-            <a:r>
-              <a:rPr lang="en-US" sz="2000">
-                <a:solidFill>
-                  <a:srgbClr val="000000"/>
-                </a:solidFill>
-                <a:latin typeface="TT Hoves"/>
-                <a:ea typeface="TT Hoves"/>
-                <a:cs typeface="TT Hoves"/>
-                <a:sym typeface="TT Hoves"/>
-              </a:rPr>
-              <a:t>Lorem ipsum dolor sit amet, consectetur adipiscing elit, sed do eiusmod tempor incididunt ut labore et dolore magna aliqua.</a:t>
-            </a:r>
-          </a:p>
+          <a:p/>
         </p:txBody>
       </p:sp>
       <p:sp>
@@ -9837,25 +8733,7 @@
             <a:spAutoFit/>
           </a:bodyPr>
           <a:lstStyle/>
-          <a:p>
-            <a:pPr algn="l">
-              <a:lnSpc>
-                <a:spcPts val="2874"/>
-              </a:lnSpc>
-            </a:pPr>
-            <a:r>
-              <a:rPr lang="en-US" sz="2499" b="true">
-                <a:solidFill>
-                  <a:srgbClr val="000000"/>
-                </a:solidFill>
-                <a:latin typeface="TT Hoves Bold"/>
-                <a:ea typeface="TT Hoves Bold"/>
-                <a:cs typeface="TT Hoves Bold"/>
-                <a:sym typeface="TT Hoves Bold"/>
-              </a:rPr>
-              <a:t>Product Design</a:t>
-            </a:r>
-          </a:p>
+          <a:p/>
         </p:txBody>
       </p:sp>
       <p:sp>
@@ -9878,25 +8756,7 @@
             <a:spAutoFit/>
           </a:bodyPr>
           <a:lstStyle/>
-          <a:p>
-            <a:pPr algn="l">
-              <a:lnSpc>
-                <a:spcPts val="2874"/>
-              </a:lnSpc>
-            </a:pPr>
-            <a:r>
-              <a:rPr lang="en-US" sz="2499" b="true">
-                <a:solidFill>
-                  <a:srgbClr val="000000"/>
-                </a:solidFill>
-                <a:latin typeface="TT Hoves Bold"/>
-                <a:ea typeface="TT Hoves Bold"/>
-                <a:cs typeface="TT Hoves Bold"/>
-                <a:sym typeface="TT Hoves Bold"/>
-              </a:rPr>
-              <a:t>Consultation</a:t>
-            </a:r>
-          </a:p>
+          <a:p/>
         </p:txBody>
       </p:sp>
       <p:sp>
@@ -9919,25 +8779,7 @@
             <a:spAutoFit/>
           </a:bodyPr>
           <a:lstStyle/>
-          <a:p>
-            <a:pPr algn="l">
-              <a:lnSpc>
-                <a:spcPts val="2874"/>
-              </a:lnSpc>
-            </a:pPr>
-            <a:r>
-              <a:rPr lang="en-US" sz="2499" b="true">
-                <a:solidFill>
-                  <a:srgbClr val="000000"/>
-                </a:solidFill>
-                <a:latin typeface="TT Hoves Bold"/>
-                <a:ea typeface="TT Hoves Bold"/>
-                <a:cs typeface="TT Hoves Bold"/>
-                <a:sym typeface="TT Hoves Bold"/>
-              </a:rPr>
-              <a:t>Management</a:t>
-            </a:r>
-          </a:p>
+          <a:p/>
         </p:txBody>
       </p:sp>
       <p:sp>
@@ -9960,25 +8802,7 @@
             <a:spAutoFit/>
           </a:bodyPr>
           <a:lstStyle/>
-          <a:p>
-            <a:pPr algn="l">
-              <a:lnSpc>
-                <a:spcPts val="2874"/>
-              </a:lnSpc>
-            </a:pPr>
-            <a:r>
-              <a:rPr lang="en-US" sz="2499" b="true">
-                <a:solidFill>
-                  <a:srgbClr val="000000"/>
-                </a:solidFill>
-                <a:latin typeface="TT Hoves Bold"/>
-                <a:ea typeface="TT Hoves Bold"/>
-                <a:cs typeface="TT Hoves Bold"/>
-                <a:sym typeface="TT Hoves Bold"/>
-              </a:rPr>
-              <a:t>Strategy Development</a:t>
-            </a:r>
-          </a:p>
+          <a:p/>
         </p:txBody>
       </p:sp>
       <p:sp>
@@ -10032,6 +8856,10 @@
             </a:stretch>
           </a:blipFill>
         </p:spPr>
+        <p:txBody>
+          <a:bodyPr/>
+          <a:p/>
+        </p:txBody>
       </p:sp>
     </p:spTree>
   </p:cSld>
@@ -10109,6 +8937,10 @@
             </a:stretch>
           </a:blipFill>
         </p:spPr>
+        <p:txBody>
+          <a:bodyPr/>
+          <a:p/>
+        </p:txBody>
       </p:sp>
       <p:sp>
         <p:nvSpPr>
@@ -10130,44 +8962,7 @@
             <a:spAutoFit/>
           </a:bodyPr>
           <a:lstStyle/>
-          <a:p>
-            <a:pPr algn="l">
-              <a:lnSpc>
-                <a:spcPts val="2500"/>
-              </a:lnSpc>
-            </a:pPr>
-            <a:r>
-              <a:rPr lang="en-US" sz="2000" spc="162">
-                <a:solidFill>
-                  <a:srgbClr val="000000"/>
-                </a:solidFill>
-                <a:latin typeface="TT Hoves"/>
-                <a:ea typeface="TT Hoves"/>
-                <a:cs typeface="TT Hoves"/>
-                <a:sym typeface="TT Hoves"/>
-              </a:rPr>
-              <a:t>Liceria</a:t>
-            </a:r>
-          </a:p>
-          <a:p>
-            <a:pPr algn="l">
-              <a:lnSpc>
-                <a:spcPts val="2500"/>
-              </a:lnSpc>
-            </a:pPr>
-            <a:r>
-              <a:rPr lang="en-US" sz="2000" spc="162">
-                <a:solidFill>
-                  <a:srgbClr val="000000"/>
-                </a:solidFill>
-                <a:latin typeface="TT Hoves"/>
-                <a:ea typeface="TT Hoves"/>
-                <a:cs typeface="TT Hoves"/>
-                <a:sym typeface="TT Hoves"/>
-              </a:rPr>
-              <a:t>&amp; Co.</a:t>
-            </a:r>
-          </a:p>
+          <a:p/>
         </p:txBody>
       </p:sp>
       <p:sp>
@@ -10190,51 +8985,9 @@
             <a:spAutoFit/>
           </a:bodyPr>
           <a:lstStyle/>
-          <a:p>
-            <a:pPr algn="l">
-              <a:lnSpc>
-                <a:spcPts val="8625"/>
-              </a:lnSpc>
-            </a:pPr>
-            <a:r>
-              <a:rPr lang="en-US" sz="7500" b="true">
-                <a:solidFill>
-                  <a:srgbClr val="000000"/>
-                </a:solidFill>
-                <a:latin typeface="TT Hoves Bold"/>
-                <a:ea typeface="TT Hoves Bold"/>
-                <a:cs typeface="TT Hoves Bold"/>
-                <a:sym typeface="TT Hoves Bold"/>
-              </a:rPr>
-              <a:t>Market Strategies</a:t>
-            </a:r>
-          </a:p>
-        </p:txBody>
-      </p:sp>
-      <p:pic>
-        <p:nvPicPr>
-          <p:cNvPr name="Picture 5" id="5"/>
-          <p:cNvPicPr>
-            <a:picLocks noChangeAspect="true"/>
-          </p:cNvPicPr>
-          <p:nvPr/>
-        </p:nvPicPr>
-        <p:blipFill>
-          <a:blip r:embed="rId4"/>
-          <a:stretch>
-            <a:fillRect/>
-          </a:stretch>
-        </p:blipFill>
-        <p:spPr>
-          <a:xfrm rot="0">
-            <a:off x="9291037" y="1327991"/>
-            <a:ext cx="7159019" cy="7125155"/>
-          </a:xfrm>
-          <a:prstGeom prst="rect">
-            <a:avLst/>
-          </a:prstGeom>
-        </p:spPr>
-      </p:pic>
+          <a:p/>
+        </p:txBody>
+      </p:sp>
       <p:sp>
         <p:nvSpPr>
           <p:cNvPr name="TextBox 6" id="6"/>
@@ -10255,28 +9008,7 @@
             <a:spAutoFit/>
           </a:bodyPr>
           <a:lstStyle/>
-          <a:p>
-            <a:pPr algn="l">
-              <a:lnSpc>
-                <a:spcPts val="2500"/>
-              </a:lnSpc>
-              <a:spcBef>
-                <a:spcPct val="0"/>
-              </a:spcBef>
-            </a:pPr>
-            <a:r>
-              <a:rPr lang="en-US" sz="2000">
-                <a:solidFill>
-                  <a:srgbClr val="000000"/>
-                </a:solidFill>
-                <a:latin typeface="TT Hoves"/>
-                <a:ea typeface="TT Hoves"/>
-                <a:cs typeface="TT Hoves"/>
-                <a:sym typeface="TT Hoves"/>
-              </a:rPr>
-              <a:t>Lorem ipsum dolor sit amet, consectetur adipiscing elit, sed do eiusmod tempor incididunt ut labore et dolore magna aliqua. Ut enim ad minim veniam, quis nostrud exercitation ullamco laboris nisi ut aliquip ex ea commodo consequat. Duis aute irure dolor in reprehenderit in voluptate velit esse cillum dolore eu fugiat nulla pariatur. </a:t>
-            </a:r>
-          </a:p>
+          <a:p/>
         </p:txBody>
       </p:sp>
       <p:grpSp>
